--- a/交付物/演示文稿/M0_演示文稿_CFG-5_第7课_为我的作品立项_v2.pptx
+++ b/交付物/演示文稿/M0_演示文稿_CFG-5_第7课_为我的作品立项_v2.pptx
@@ -1913,7 +1913,7 @@
                 <a:latin typeface="MiSans"/>
                 <a:ea typeface="MiSans"/>
               </a:rPr>
-              <a:t>柴火创客学院 M0 · CFG-5 学期班</a:t>
+              <a:t>柴火创客学园 M0 · CFG-5 学期班</a:t>
             </a:r>
             <a:endParaRPr lang="en-US" sz="1400"/>
           </a:p>
@@ -2874,7 +2874,7 @@
                 <a:latin typeface="Noto Sans SC"/>
                 <a:ea typeface="Noto Sans SC"/>
               </a:rPr>
-              <a:t>柴火创客学院 M0 · 第 7 课 · 为我的作品立项</a:t>
+              <a:t>柴火创客学园 M0 · 第 7 课 · 为我的作品立项</a:t>
             </a:r>
             <a:endParaRPr lang="en-US" sz="1100"/>
           </a:p>
@@ -3744,7 +3744,7 @@
                 <a:latin typeface="Noto Sans SC"/>
                 <a:ea typeface="Noto Sans SC"/>
               </a:rPr>
-              <a:t>柴火创客学院 M0 · 第 7 课 · 为我的作品立项</a:t>
+              <a:t>柴火创客学园 M0 · 第 7 课 · 为我的作品立项</a:t>
             </a:r>
             <a:endParaRPr lang="en-US" sz="1100"/>
           </a:p>
@@ -4419,7 +4419,7 @@
                 <a:latin typeface="Noto Sans SC"/>
                 <a:ea typeface="Noto Sans SC"/>
               </a:rPr>
-              <a:t>柴火创客学院 M0 · 第 7 课 · 为我的作品立项</a:t>
+              <a:t>柴火创客学园 M0 · 第 7 课 · 为我的作品立项</a:t>
             </a:r>
             <a:endParaRPr lang="en-US" sz="1100"/>
           </a:p>
@@ -4968,7 +4968,7 @@
                 <a:latin typeface="Noto Sans SC"/>
                 <a:ea typeface="Noto Sans SC"/>
               </a:rPr>
-              <a:t>柴火创客学院 M0 · 第 7 课 · 为我的作品立项</a:t>
+              <a:t>柴火创客学园 M0 · 第 7 课 · 为我的作品立项</a:t>
             </a:r>
             <a:endParaRPr lang="en-US" sz="1100"/>
           </a:p>
@@ -5668,7 +5668,7 @@
                 <a:latin typeface="Noto Sans SC"/>
                 <a:ea typeface="Noto Sans SC"/>
               </a:rPr>
-              <a:t>柴火创客学院 M0 · 第 7 课 · 为我的作品立项</a:t>
+              <a:t>柴火创客学园 M0 · 第 7 课 · 为我的作品立项</a:t>
             </a:r>
             <a:endParaRPr lang="en-US" sz="1100"/>
           </a:p>
@@ -6279,7 +6279,7 @@
                 <a:latin typeface="Noto Sans SC"/>
                 <a:ea typeface="Noto Sans SC"/>
               </a:rPr>
-              <a:t>柴火创客学院 M0 · 第 7 课 · 为我的作品立项</a:t>
+              <a:t>柴火创客学园 M0 · 第 7 课 · 为我的作品立项</a:t>
             </a:r>
             <a:endParaRPr lang="en-US" sz="1100"/>
           </a:p>
@@ -7259,7 +7259,7 @@
                 <a:latin typeface="Noto Sans SC"/>
                 <a:ea typeface="Noto Sans SC"/>
               </a:rPr>
-              <a:t>柴火创客学院 M0 · 第 7 课 · 为我的作品立项</a:t>
+              <a:t>柴火创客学园 M0 · 第 7 课 · 为我的作品立项</a:t>
             </a:r>
             <a:endParaRPr lang="en-US" sz="1100"/>
           </a:p>
@@ -7927,7 +7927,7 @@
                 <a:latin typeface="Noto Sans SC"/>
                 <a:ea typeface="Noto Sans SC"/>
               </a:rPr>
-              <a:t>柴火创客学院 M0 · 第 7 课 · 为我的作品立项</a:t>
+              <a:t>柴火创客学园 M0 · 第 7 课 · 为我的作品立项</a:t>
             </a:r>
             <a:endParaRPr lang="en-US" sz="1100"/>
           </a:p>
@@ -8699,7 +8699,7 @@
                 <a:latin typeface="Noto Sans SC"/>
                 <a:ea typeface="Noto Sans SC"/>
               </a:rPr>
-              <a:t>柴火创客学院 M0 · 第 7 课 · 为我的作品立项</a:t>
+              <a:t>柴火创客学园 M0 · 第 7 课 · 为我的作品立项</a:t>
             </a:r>
             <a:endParaRPr lang="en-US" sz="1100"/>
           </a:p>
@@ -9537,7 +9537,7 @@
                 <a:latin typeface="Noto Sans SC"/>
                 <a:ea typeface="Noto Sans SC"/>
               </a:rPr>
-              <a:t>柴火创客学院 M0 · 第 7 课 · 为我的作品立项</a:t>
+              <a:t>柴火创客学园 M0 · 第 7 课 · 为我的作品立项</a:t>
             </a:r>
             <a:endParaRPr lang="en-US" sz="1100"/>
           </a:p>
@@ -10123,7 +10123,7 @@
                 <a:latin typeface="Noto Sans SC"/>
                 <a:ea typeface="Noto Sans SC"/>
               </a:rPr>
-              <a:t>柴火创客学院 M0 · 第 7 课 · 为我的作品立项</a:t>
+              <a:t>柴火创客学园 M0 · 第 7 课 · 为我的作品立项</a:t>
             </a:r>
             <a:endParaRPr lang="en-US" sz="1100"/>
           </a:p>
@@ -10771,7 +10771,7 @@
                 <a:latin typeface="Noto Sans SC"/>
                 <a:ea typeface="Noto Sans SC"/>
               </a:rPr>
-              <a:t>柴火创客学院 M0 · 第 7 课 · 为我的作品立项</a:t>
+              <a:t>柴火创客学园 M0 · 第 7 课 · 为我的作品立项</a:t>
             </a:r>
             <a:endParaRPr lang="en-US" sz="1100"/>
           </a:p>
@@ -11375,7 +11375,7 @@
                 <a:latin typeface="Noto Sans SC"/>
                 <a:ea typeface="Noto Sans SC"/>
               </a:rPr>
-              <a:t>柴火创客学院 M0 · 第 7 课 · 为我的作品立项</a:t>
+              <a:t>柴火创客学园 M0 · 第 7 课 · 为我的作品立项</a:t>
             </a:r>
             <a:endParaRPr lang="en-US" sz="1100"/>
           </a:p>
@@ -11909,7 +11909,7 @@
                 <a:latin typeface="Noto Sans SC"/>
                 <a:ea typeface="Noto Sans SC"/>
               </a:rPr>
-              <a:t>柴火创客学院 M0 · 第 7 课 · 为我的作品立项</a:t>
+              <a:t>柴火创客学园 M0 · 第 7 课 · 为我的作品立项</a:t>
             </a:r>
             <a:endParaRPr lang="en-US" sz="1100"/>
           </a:p>
@@ -12859,7 +12859,7 @@
                 <a:latin typeface="Noto Sans SC"/>
                 <a:ea typeface="Noto Sans SC"/>
               </a:rPr>
-              <a:t>柴火创客学院 M0 · 第 7 课 · 为我的作品立项</a:t>
+              <a:t>柴火创客学园 M0 · 第 7 课 · 为我的作品立项</a:t>
             </a:r>
             <a:endParaRPr lang="en-US" sz="1100"/>
           </a:p>
@@ -13377,7 +13377,7 @@
                 <a:latin typeface="Noto Sans SC"/>
                 <a:ea typeface="Noto Sans SC"/>
               </a:rPr>
-              <a:t>柴火创客学院 M0 · 第 7 课 · 为我的作品立项</a:t>
+              <a:t>柴火创客学园 M0 · 第 7 课 · 为我的作品立项</a:t>
             </a:r>
             <a:endParaRPr lang="en-US" sz="1100"/>
           </a:p>
@@ -14003,7 +14003,7 @@
                 <a:latin typeface="Noto Sans SC"/>
                 <a:ea typeface="Noto Sans SC"/>
               </a:rPr>
-              <a:t>柴火创客学院 M0 · 第 7 课 · 为我的作品立项</a:t>
+              <a:t>柴火创客学园 M0 · 第 7 课 · 为我的作品立项</a:t>
             </a:r>
             <a:endParaRPr lang="en-US" sz="1100"/>
           </a:p>
@@ -15455,7 +15455,7 @@
                 <a:latin typeface="Noto Sans SC"/>
                 <a:ea typeface="Noto Sans SC"/>
               </a:rPr>
-              <a:t>柴火创客学院 M0 · 第 7 课 · 为我的作品立项</a:t>
+              <a:t>柴火创客学园 M0 · 第 7 课 · 为我的作品立项</a:t>
             </a:r>
             <a:endParaRPr lang="en-US" sz="1100"/>
           </a:p>
